--- a/CWE_Maccarone_Morandi.pptx
+++ b/CWE_Maccarone_Morandi.pptx
@@ -199,7 +199,7 @@
           <a:p>
             <a:fld id="{1D8BD707-D9CF-40AE-B4C6-C98DA3205C09}" type="datetimeFigureOut">
               <a:rPr lang="en-US"/>
-              <a:t>6/13/2026</a:t>
+              <a:t>6/14/2026</a:t>
             </a:fld>
             <a:endParaRPr lang="en-US"/>
           </a:p>
@@ -388,7 +388,7 @@
           <a:p>
             <a:fld id="{1D8BD707-D9CF-40AE-B4C6-C98DA3205C09}" type="datetimeFigureOut">
               <a:rPr lang="en-US"/>
-              <a:t>6/13/2026</a:t>
+              <a:t>6/14/2026</a:t>
             </a:fld>
             <a:endParaRPr lang="en-US"/>
           </a:p>
@@ -614,7 +614,7 @@
           <a:p>
             <a:fld id="{1D8BD707-D9CF-40AE-B4C6-C98DA3205C09}" type="datetimeFigureOut">
               <a:rPr lang="en-US"/>
-              <a:t>6/13/2026</a:t>
+              <a:t>6/14/2026</a:t>
             </a:fld>
             <a:endParaRPr lang="en-US"/>
           </a:p>
@@ -774,7 +774,7 @@
           <a:p>
             <a:fld id="{1D8BD707-D9CF-40AE-B4C6-C98DA3205C09}" type="datetimeFigureOut">
               <a:rPr lang="en-US"/>
-              <a:t>6/13/2026</a:t>
+              <a:t>6/14/2026</a:t>
             </a:fld>
             <a:endParaRPr lang="en-US"/>
           </a:p>
@@ -905,7 +905,7 @@
           <a:p>
             <a:fld id="{1D8BD707-D9CF-40AE-B4C6-C98DA3205C09}" type="datetimeFigureOut">
               <a:rPr lang="en-US"/>
-              <a:t>6/13/2026</a:t>
+              <a:t>6/14/2026</a:t>
             </a:fld>
             <a:endParaRPr lang="en-US"/>
           </a:p>
@@ -1008,7 +1008,7 @@
           <a:p>
             <a:fld id="{5A166EBB-33BB-45B9-9240-4E9A4120B5B1}" type="datetimeFigureOut">
               <a:rPr lang="en-US" smtClean="0"/>
-              <a:t>6/13/2026</a:t>
+              <a:t>6/14/2026</a:t>
             </a:fld>
             <a:endParaRPr lang="en-US"/>
           </a:p>
@@ -1292,7 +1292,7 @@
           <a:p>
             <a:fld id="{1D8BD707-D9CF-40AE-B4C6-C98DA3205C09}" type="datetimeFigureOut">
               <a:rPr lang="en-US"/>
-              <a:t>6/13/2026</a:t>
+              <a:t>6/14/2026</a:t>
             </a:fld>
             <a:endParaRPr lang="en-US"/>
           </a:p>
@@ -2732,7 +2732,7 @@
         <p:spPr>
           <a:xfrm>
             <a:off x="1884819" y="3052298"/>
-            <a:ext cx="1990725" cy="193040"/>
+            <a:ext cx="1990725" cy="167995"/>
           </a:xfrm>
           <a:prstGeom prst="rect">
             <a:avLst/>
@@ -2910,7 +2910,17 @@
                 <a:latin typeface="Tahoma"/>
                 <a:cs typeface="Tahoma"/>
               </a:rPr>
-              <a:t>step.</a:t>
+              <a:t>step</a:t>
+            </a:r>
+            <a:r>
+              <a:rPr lang="it-IT" sz="1000" spc="-10" dirty="0">
+                <a:solidFill>
+                  <a:srgbClr val="3F3F3F"/>
+                </a:solidFill>
+                <a:latin typeface="Tahoma"/>
+                <a:cs typeface="Tahoma"/>
+              </a:rPr>
+              <a:t>.</a:t>
             </a:r>
             <a:endParaRPr sz="1000" dirty="0">
               <a:latin typeface="Tahoma"/>
@@ -3138,7 +3148,7 @@
               </a:rPr>
               <a:t>Simulation</a:t>
             </a:r>
-            <a:endParaRPr sz="900">
+            <a:endParaRPr sz="900" dirty="0">
               <a:latin typeface="Tahoma"/>
               <a:cs typeface="Tahoma"/>
             </a:endParaRPr>
@@ -3512,7 +3522,17 @@
               </a:rPr>
               <a:t>0</a:t>
             </a:r>
-            <a:endParaRPr sz="1100">
+            <a:r>
+              <a:rPr lang="it-IT" sz="1100" spc="-50" dirty="0">
+                <a:solidFill>
+                  <a:srgbClr val="3F3F3F"/>
+                </a:solidFill>
+                <a:latin typeface="Cambria"/>
+                <a:cs typeface="Cambria"/>
+              </a:rPr>
+              <a:t>.</a:t>
+            </a:r>
+            <a:endParaRPr sz="1100" dirty="0">
               <a:latin typeface="Cambria"/>
               <a:cs typeface="Cambria"/>
             </a:endParaRPr>
@@ -3736,7 +3756,17 @@
               </a:rPr>
               <a:t>period</a:t>
             </a:r>
-            <a:endParaRPr sz="1100">
+            <a:r>
+              <a:rPr lang="it-IT" sz="1100" spc="-10" dirty="0">
+                <a:solidFill>
+                  <a:srgbClr val="3F3F3F"/>
+                </a:solidFill>
+                <a:latin typeface="Tahoma"/>
+                <a:cs typeface="Tahoma"/>
+              </a:rPr>
+              <a:t>.</a:t>
+            </a:r>
+            <a:endParaRPr sz="1100" dirty="0">
               <a:latin typeface="Tahoma"/>
               <a:cs typeface="Tahoma"/>
             </a:endParaRPr>
@@ -3774,7 +3804,7 @@
         <p:spPr>
           <a:xfrm>
             <a:off x="1824240" y="2878256"/>
-            <a:ext cx="2112010" cy="177800"/>
+            <a:ext cx="2112010" cy="166071"/>
           </a:xfrm>
           <a:prstGeom prst="rect">
             <a:avLst/>
@@ -3903,6 +3933,16 @@
                 <a:cs typeface="Tahoma"/>
               </a:rPr>
               <a:t>period</a:t>
+            </a:r>
+            <a:r>
+              <a:rPr lang="it-IT" sz="1000" spc="-10" dirty="0">
+                <a:solidFill>
+                  <a:srgbClr val="3F3F3F"/>
+                </a:solidFill>
+                <a:latin typeface="Tahoma"/>
+                <a:cs typeface="Tahoma"/>
+              </a:rPr>
+              <a:t>.</a:t>
             </a:r>
             <a:endParaRPr sz="1000" dirty="0">
               <a:latin typeface="Tahoma"/>
@@ -4729,7 +4769,7 @@
               </a:rPr>
               <a:t>data:</a:t>
             </a:r>
-            <a:endParaRPr sz="1100">
+            <a:endParaRPr sz="1100" dirty="0">
               <a:latin typeface="Tahoma"/>
               <a:cs typeface="Tahoma"/>
             </a:endParaRPr>
@@ -5234,7 +5274,13 @@
           <p:cNvGraphicFramePr>
             <a:graphicFrameLocks noGrp="1"/>
           </p:cNvGraphicFramePr>
-          <p:nvPr/>
+          <p:nvPr>
+            <p:extLst>
+              <p:ext uri="{D42A27DB-BD31-4B8C-83A1-F6EECF244321}">
+                <p14:modId xmlns:p14="http://schemas.microsoft.com/office/powerpoint/2010/main" val="1673477750"/>
+              </p:ext>
+            </p:extLst>
+          </p:nvPr>
         </p:nvGraphicFramePr>
         <p:xfrm>
           <a:off x="3483800" y="1288237"/>
@@ -5466,7 +5512,7 @@
                         </a:rPr>
                         <a:t>0</a:t>
                       </a:r>
-                      <a:endParaRPr sz="1100">
+                      <a:endParaRPr sz="1100" dirty="0">
                         <a:latin typeface="Cambria"/>
                         <a:cs typeface="Cambria"/>
                       </a:endParaRPr>
@@ -5491,14 +5537,14 @@
                         <a:t>C</a:t>
                       </a:r>
                       <a:r>
-                        <a:rPr sz="1200" i="1" baseline="-10416" dirty="0">
+                        <a:rPr lang="it-IT" sz="1200" i="1" baseline="-10416" dirty="0">
                           <a:solidFill>
                             <a:srgbClr val="3F3F3F"/>
                           </a:solidFill>
                           <a:latin typeface="Cambria"/>
                           <a:cs typeface="Cambria"/>
                         </a:rPr>
-                        <a:t>P</a:t>
+                        <a:t>p</a:t>
                       </a:r>
                       <a:r>
                         <a:rPr sz="1100" i="1" dirty="0">
@@ -5580,7 +5626,7 @@
                         </a:rPr>
                         <a:t>)</a:t>
                       </a:r>
-                      <a:endParaRPr sz="1100">
+                      <a:endParaRPr sz="1100" dirty="0">
                         <a:latin typeface="Tahoma"/>
                         <a:cs typeface="Tahoma"/>
                       </a:endParaRPr>
@@ -5754,7 +5800,7 @@
                         </a:rPr>
                         <a:t>5</a:t>
                       </a:r>
-                      <a:endParaRPr sz="1100">
+                      <a:endParaRPr sz="1100" dirty="0">
                         <a:latin typeface="Cambria"/>
                         <a:cs typeface="Cambria"/>
                       </a:endParaRPr>
@@ -6129,7 +6175,7 @@
                 <a:latin typeface="Tahoma"/>
                 <a:cs typeface="Tahoma"/>
               </a:rPr>
-              <a:t>Contour plot of the vorticity</a:t>
+              <a:t>Contour plot of the vorticity.</a:t>
             </a:r>
             <a:endParaRPr sz="1000" dirty="0">
               <a:latin typeface="Tahoma"/>
@@ -6221,7 +6267,7 @@
                 <a:latin typeface="Cambria"/>
                 <a:cs typeface="Cambria"/>
               </a:rPr>
-              <a:t>k</a:t>
+              <a:t>k.</a:t>
             </a:r>
             <a:endParaRPr sz="1000" dirty="0">
               <a:latin typeface="Tahoma"/>
@@ -6921,14 +6967,14 @@
               <a:t>C</a:t>
             </a:r>
             <a:r>
-              <a:rPr sz="1200" i="1" spc="-30" baseline="-10416" dirty="0">
+              <a:rPr lang="it-IT" sz="1200" i="1" spc="-30" baseline="-10416" dirty="0">
                 <a:solidFill>
                   <a:srgbClr val="3F3F3F"/>
                 </a:solidFill>
                 <a:latin typeface="Cambria"/>
                 <a:cs typeface="Cambria"/>
               </a:rPr>
-              <a:t>P</a:t>
+              <a:t>p</a:t>
             </a:r>
             <a:r>
               <a:rPr sz="1100" spc="-20" dirty="0">
@@ -6939,6 +6985,16 @@
                 <a:cs typeface="Tahoma"/>
               </a:rPr>
               <a:t>)</a:t>
+            </a:r>
+            <a:r>
+              <a:rPr lang="it-IT" sz="1100" spc="-20" dirty="0">
+                <a:solidFill>
+                  <a:srgbClr val="3F3F3F"/>
+                </a:solidFill>
+                <a:latin typeface="Tahoma"/>
+                <a:cs typeface="Tahoma"/>
+              </a:rPr>
+              <a:t>.</a:t>
             </a:r>
             <a:endParaRPr sz="1100" dirty="0">
               <a:latin typeface="Tahoma"/>
@@ -7118,7 +7174,7 @@
               </a:rPr>
               <a:t>Velocity</a:t>
             </a:r>
-            <a:endParaRPr sz="1400">
+            <a:endParaRPr sz="1400" dirty="0">
               <a:latin typeface="Tahoma"/>
               <a:cs typeface="Tahoma"/>
             </a:endParaRPr>
@@ -7159,7 +7215,7 @@
               </a:rPr>
               <a:t>Results</a:t>
             </a:r>
-            <a:endParaRPr sz="900">
+            <a:endParaRPr sz="900" dirty="0">
               <a:latin typeface="Tahoma"/>
               <a:cs typeface="Tahoma"/>
             </a:endParaRPr>
@@ -7443,7 +7499,17 @@
               </a:rPr>
               <a:t>5</a:t>
             </a:r>
-            <a:endParaRPr sz="1100">
+            <a:r>
+              <a:rPr lang="it-IT" sz="1100" spc="-25" dirty="0">
+                <a:solidFill>
+                  <a:srgbClr val="3F3F3F"/>
+                </a:solidFill>
+                <a:latin typeface="Cambria"/>
+                <a:cs typeface="Cambria"/>
+              </a:rPr>
+              <a:t>.</a:t>
+            </a:r>
+            <a:endParaRPr sz="1100" dirty="0">
               <a:latin typeface="Cambria"/>
               <a:cs typeface="Cambria"/>
             </a:endParaRPr>
@@ -16112,7 +16178,7 @@
               </a:rPr>
               <a:t>Simulation</a:t>
             </a:r>
-            <a:endParaRPr sz="900">
+            <a:endParaRPr sz="900" dirty="0">
               <a:latin typeface="Tahoma"/>
               <a:cs typeface="Tahoma"/>
             </a:endParaRPr>
@@ -16454,9 +16520,19 @@
                 <a:latin typeface="Tahoma"/>
                 <a:cs typeface="Tahoma"/>
               </a:rPr>
-              <a:t>standard.</a:t>
-            </a:r>
-            <a:endParaRPr sz="1100">
+              <a:t>standard</a:t>
+            </a:r>
+            <a:r>
+              <a:rPr lang="it-IT" sz="1100" spc="-10" dirty="0">
+                <a:solidFill>
+                  <a:srgbClr val="3F3F3F"/>
+                </a:solidFill>
+                <a:latin typeface="Tahoma"/>
+                <a:cs typeface="Tahoma"/>
+              </a:rPr>
+              <a:t>.</a:t>
+            </a:r>
+            <a:endParaRPr sz="1100" dirty="0">
               <a:latin typeface="Tahoma"/>
               <a:cs typeface="Tahoma"/>
             </a:endParaRPr>
@@ -16651,16 +16727,16 @@
               <a:t>k</a:t>
             </a:r>
             <a:r>
-              <a:rPr sz="1100" spc="-25" dirty="0">
-                <a:solidFill>
-                  <a:srgbClr val="3F3F3F"/>
-                </a:solidFill>
-                <a:latin typeface="Tahoma"/>
-                <a:cs typeface="Tahoma"/>
+              <a:rPr lang="it-IT" sz="1100" i="1" spc="-25" dirty="0">
+                <a:solidFill>
+                  <a:srgbClr val="3F3F3F"/>
+                </a:solidFill>
+                <a:latin typeface="Cambria"/>
+                <a:cs typeface="Cambria"/>
               </a:rPr>
               <a:t>.</a:t>
             </a:r>
-            <a:endParaRPr sz="1100">
+            <a:endParaRPr sz="1100" dirty="0">
               <a:latin typeface="Tahoma"/>
               <a:cs typeface="Tahoma"/>
             </a:endParaRPr>
